--- a/kb/papers/lpscl_vs_lpscl16_seminar_v1.pptx
+++ b/kb/papers/lpscl_vs_lpscl16_seminar_v1.pptx
@@ -4585,6 +4585,61 @@
           </a:p>
         </p:txBody>
       </p:sp>
+      <p:sp>
+        <p:nvSpPr>
+          <p:cNvPr id="12" name="Rounded Rectangle 11"/>
+          <p:cNvSpPr/>
+          <p:nvPr/>
+        </p:nvSpPr>
+        <p:spPr>
+          <a:xfrm>
+            <a:off x="7528255" y="347472"/>
+            <a:ext cx="4206240" cy="384048"/>
+          </a:xfrm>
+          <a:prstGeom prst="roundRect">
+            <a:avLst/>
+          </a:prstGeom>
+          <a:solidFill>
+            <a:srgbClr val="FFF19A"/>
+          </a:solidFill>
+          <a:ln w="12700">
+            <a:solidFill>
+              <a:srgbClr val="C89A00"/>
+            </a:solidFill>
+          </a:ln>
+          <a:effectLst/>
+        </p:spPr>
+        <p:style>
+          <a:lnRef idx="1">
+            <a:schemeClr val="accent1"/>
+          </a:lnRef>
+          <a:fillRef idx="3">
+            <a:schemeClr val="accent1"/>
+          </a:fillRef>
+          <a:effectRef idx="2">
+            <a:schemeClr val="accent1"/>
+          </a:effectRef>
+          <a:fontRef idx="minor">
+            <a:schemeClr val="lt1"/>
+          </a:fontRef>
+        </p:style>
+        <p:txBody>
+          <a:bodyPr rtlCol="0" anchor="ctr" wrap="square" lIns="73152" rIns="73152" tIns="18288" bIns="18288"/>
+          <a:lstStyle/>
+          <a:p>
+            <a:pPr algn="l"/>
+            <a:r>
+              <a:rPr sz="1000" b="1">
+                <a:solidFill>
+                  <a:srgbClr val="664D00"/>
+                </a:solidFill>
+                <a:latin typeface="맑은 고딕"/>
+              </a:rPr>
+              <a:t>📎 사진 첨부: Cohesive / Li–anion ionic glue 모식도 또는 막대</a:t>
+            </a:r>
+          </a:p>
+        </p:txBody>
+      </p:sp>
     </p:spTree>
   </p:cSld>
   <p:clrMapOvr>
@@ -5918,6 +5973,61 @@
           </a:p>
         </p:txBody>
       </p:sp>
+      <p:sp>
+        <p:nvSpPr>
+          <p:cNvPr id="12" name="Rounded Rectangle 11"/>
+          <p:cNvSpPr/>
+          <p:nvPr/>
+        </p:nvSpPr>
+        <p:spPr>
+          <a:xfrm>
+            <a:off x="7528255" y="347472"/>
+            <a:ext cx="4206240" cy="384048"/>
+          </a:xfrm>
+          <a:prstGeom prst="roundRect">
+            <a:avLst/>
+          </a:prstGeom>
+          <a:solidFill>
+            <a:srgbClr val="FFF19A"/>
+          </a:solidFill>
+          <a:ln w="12700">
+            <a:solidFill>
+              <a:srgbClr val="C89A00"/>
+            </a:solidFill>
+          </a:ln>
+          <a:effectLst/>
+        </p:spPr>
+        <p:style>
+          <a:lnRef idx="1">
+            <a:schemeClr val="accent1"/>
+          </a:lnRef>
+          <a:fillRef idx="3">
+            <a:schemeClr val="accent1"/>
+          </a:fillRef>
+          <a:effectRef idx="2">
+            <a:schemeClr val="accent1"/>
+          </a:effectRef>
+          <a:fontRef idx="minor">
+            <a:schemeClr val="lt1"/>
+          </a:fontRef>
+        </p:style>
+        <p:txBody>
+          <a:bodyPr rtlCol="0" anchor="ctr" wrap="square" lIns="73152" rIns="73152" tIns="18288" bIns="18288"/>
+          <a:lstStyle/>
+          <a:p>
+            <a:pPr algn="l"/>
+            <a:r>
+              <a:rPr sz="1000" b="1">
+                <a:solidFill>
+                  <a:srgbClr val="664D00"/>
+                </a:solidFill>
+                <a:latin typeface="맑은 고딕"/>
+              </a:rPr>
+              <a:t>📎 사진 첨부: Elastic moduli (B, G, E) clamped vs relaxed 비교 막대</a:t>
+            </a:r>
+          </a:p>
+        </p:txBody>
+      </p:sp>
     </p:spTree>
   </p:cSld>
   <p:clrMapOvr>
@@ -6910,6 +7020,61 @@
           </a:p>
         </p:txBody>
       </p:sp>
+      <p:sp>
+        <p:nvSpPr>
+          <p:cNvPr id="11" name="Rounded Rectangle 10"/>
+          <p:cNvSpPr/>
+          <p:nvPr/>
+        </p:nvSpPr>
+        <p:spPr>
+          <a:xfrm>
+            <a:off x="7528255" y="347472"/>
+            <a:ext cx="4206240" cy="384048"/>
+          </a:xfrm>
+          <a:prstGeom prst="roundRect">
+            <a:avLst/>
+          </a:prstGeom>
+          <a:solidFill>
+            <a:srgbClr val="FFF19A"/>
+          </a:solidFill>
+          <a:ln w="12700">
+            <a:solidFill>
+              <a:srgbClr val="C89A00"/>
+            </a:solidFill>
+          </a:ln>
+          <a:effectLst/>
+        </p:spPr>
+        <p:style>
+          <a:lnRef idx="1">
+            <a:schemeClr val="accent1"/>
+          </a:lnRef>
+          <a:fillRef idx="3">
+            <a:schemeClr val="accent1"/>
+          </a:fillRef>
+          <a:effectRef idx="2">
+            <a:schemeClr val="accent1"/>
+          </a:effectRef>
+          <a:fontRef idx="minor">
+            <a:schemeClr val="lt1"/>
+          </a:fontRef>
+        </p:style>
+        <p:txBody>
+          <a:bodyPr rtlCol="0" anchor="ctr" wrap="square" lIns="73152" rIns="73152" tIns="18288" bIns="18288"/>
+          <a:lstStyle/>
+          <a:p>
+            <a:pPr algn="l"/>
+            <a:r>
+              <a:rPr sz="1000" b="1">
+                <a:solidFill>
+                  <a:srgbClr val="664D00"/>
+                </a:solidFill>
+                <a:latin typeface="맑은 고딕"/>
+              </a:rPr>
+              <a:t>📎 사진 첨부: Cij component bar (C44 강조)</a:t>
+            </a:r>
+          </a:p>
+        </p:txBody>
+      </p:sp>
     </p:spTree>
   </p:cSld>
   <p:clrMapOvr>
@@ -7710,6 +7875,61 @@
           </a:p>
         </p:txBody>
       </p:sp>
+      <p:sp>
+        <p:nvSpPr>
+          <p:cNvPr id="8" name="Rounded Rectangle 7"/>
+          <p:cNvSpPr/>
+          <p:nvPr/>
+        </p:nvSpPr>
+        <p:spPr>
+          <a:xfrm>
+            <a:off x="7528255" y="347472"/>
+            <a:ext cx="4206240" cy="384048"/>
+          </a:xfrm>
+          <a:prstGeom prst="roundRect">
+            <a:avLst/>
+          </a:prstGeom>
+          <a:solidFill>
+            <a:srgbClr val="FFF19A"/>
+          </a:solidFill>
+          <a:ln w="12700">
+            <a:solidFill>
+              <a:srgbClr val="C89A00"/>
+            </a:solidFill>
+          </a:ln>
+          <a:effectLst/>
+        </p:spPr>
+        <p:style>
+          <a:lnRef idx="1">
+            <a:schemeClr val="accent1"/>
+          </a:lnRef>
+          <a:fillRef idx="3">
+            <a:schemeClr val="accent1"/>
+          </a:fillRef>
+          <a:effectRef idx="2">
+            <a:schemeClr val="accent1"/>
+          </a:effectRef>
+          <a:fontRef idx="minor">
+            <a:schemeClr val="lt1"/>
+          </a:fontRef>
+        </p:style>
+        <p:txBody>
+          <a:bodyPr rtlCol="0" anchor="ctr" wrap="square" lIns="73152" rIns="73152" tIns="18288" bIns="18288"/>
+          <a:lstStyle/>
+          <a:p>
+            <a:pPr algn="l"/>
+            <a:r>
+              <a:rPr sz="1000" b="1">
+                <a:solidFill>
+                  <a:srgbClr val="664D00"/>
+                </a:solidFill>
+                <a:latin typeface="맑은 고딕"/>
+              </a:rPr>
+              <a:t>📎 사진 첨부: M4 4 cross-check 수렴 그림</a:t>
+            </a:r>
+          </a:p>
+        </p:txBody>
+      </p:sp>
     </p:spTree>
   </p:cSld>
   <p:clrMapOvr>
@@ -8719,6 +8939,61 @@
           </a:p>
         </p:txBody>
       </p:sp>
+      <p:sp>
+        <p:nvSpPr>
+          <p:cNvPr id="9" name="Rounded Rectangle 8"/>
+          <p:cNvSpPr/>
+          <p:nvPr/>
+        </p:nvSpPr>
+        <p:spPr>
+          <a:xfrm>
+            <a:off x="7528255" y="347472"/>
+            <a:ext cx="4206240" cy="384048"/>
+          </a:xfrm>
+          <a:prstGeom prst="roundRect">
+            <a:avLst/>
+          </a:prstGeom>
+          <a:solidFill>
+            <a:srgbClr val="FFF19A"/>
+          </a:solidFill>
+          <a:ln w="12700">
+            <a:solidFill>
+              <a:srgbClr val="C89A00"/>
+            </a:solidFill>
+          </a:ln>
+          <a:effectLst/>
+        </p:spPr>
+        <p:style>
+          <a:lnRef idx="1">
+            <a:schemeClr val="accent1"/>
+          </a:lnRef>
+          <a:fillRef idx="3">
+            <a:schemeClr val="accent1"/>
+          </a:fillRef>
+          <a:effectRef idx="2">
+            <a:schemeClr val="accent1"/>
+          </a:effectRef>
+          <a:fontRef idx="minor">
+            <a:schemeClr val="lt1"/>
+          </a:fontRef>
+        </p:style>
+        <p:txBody>
+          <a:bodyPr rtlCol="0" anchor="ctr" wrap="square" lIns="73152" rIns="73152" tIns="18288" bIns="18288"/>
+          <a:lstStyle/>
+          <a:p>
+            <a:pPr algn="l"/>
+            <a:r>
+              <a:rPr sz="1000" b="1">
+                <a:solidFill>
+                  <a:srgbClr val="664D00"/>
+                </a:solidFill>
+                <a:latin typeface="맑은 고딕"/>
+              </a:rPr>
+              <a:t>📎 사진 첨부: PS₄ 결합 길이/각도 히스토그램 (두 시스템 overlay)</a:t>
+            </a:r>
+          </a:p>
+        </p:txBody>
+      </p:sp>
     </p:spTree>
   </p:cSld>
   <p:clrMapOvr>
@@ -9884,6 +10159,61 @@
           </a:p>
         </p:txBody>
       </p:sp>
+      <p:sp>
+        <p:nvSpPr>
+          <p:cNvPr id="12" name="Rounded Rectangle 11"/>
+          <p:cNvSpPr/>
+          <p:nvPr/>
+        </p:nvSpPr>
+        <p:spPr>
+          <a:xfrm>
+            <a:off x="7528255" y="347472"/>
+            <a:ext cx="4206240" cy="384048"/>
+          </a:xfrm>
+          <a:prstGeom prst="roundRect">
+            <a:avLst/>
+          </a:prstGeom>
+          <a:solidFill>
+            <a:srgbClr val="FFF19A"/>
+          </a:solidFill>
+          <a:ln w="12700">
+            <a:solidFill>
+              <a:srgbClr val="C89A00"/>
+            </a:solidFill>
+          </a:ln>
+          <a:effectLst/>
+        </p:spPr>
+        <p:style>
+          <a:lnRef idx="1">
+            <a:schemeClr val="accent1"/>
+          </a:lnRef>
+          <a:fillRef idx="3">
+            <a:schemeClr val="accent1"/>
+          </a:fillRef>
+          <a:effectRef idx="2">
+            <a:schemeClr val="accent1"/>
+          </a:effectRef>
+          <a:fontRef idx="minor">
+            <a:schemeClr val="lt1"/>
+          </a:fontRef>
+        </p:style>
+        <p:txBody>
+          <a:bodyPr rtlCol="0" anchor="ctr" wrap="square" lIns="73152" rIns="73152" tIns="18288" bIns="18288"/>
+          <a:lstStyle/>
+          <a:p>
+            <a:pPr algn="l"/>
+            <a:r>
+              <a:rPr sz="1000" b="1">
+                <a:solidFill>
+                  <a:srgbClr val="664D00"/>
+                </a:solidFill>
+                <a:latin typeface="맑은 고딕"/>
+              </a:rPr>
+              <a:t>📎 사진 첨부: Li–Cl per-bond 히스토그램 (4a vs 4d-AS 분리)</a:t>
+            </a:r>
+          </a:p>
+        </p:txBody>
+      </p:sp>
     </p:spTree>
   </p:cSld>
   <p:clrMapOvr>
@@ -10825,6 +11155,61 @@
           </a:p>
         </p:txBody>
       </p:sp>
+      <p:sp>
+        <p:nvSpPr>
+          <p:cNvPr id="11" name="Rounded Rectangle 10"/>
+          <p:cNvSpPr/>
+          <p:nvPr/>
+        </p:nvSpPr>
+        <p:spPr>
+          <a:xfrm>
+            <a:off x="7528255" y="347472"/>
+            <a:ext cx="4206240" cy="384048"/>
+          </a:xfrm>
+          <a:prstGeom prst="roundRect">
+            <a:avLst/>
+          </a:prstGeom>
+          <a:solidFill>
+            <a:srgbClr val="FFF19A"/>
+          </a:solidFill>
+          <a:ln w="12700">
+            <a:solidFill>
+              <a:srgbClr val="C89A00"/>
+            </a:solidFill>
+          </a:ln>
+          <a:effectLst/>
+        </p:spPr>
+        <p:style>
+          <a:lnRef idx="1">
+            <a:schemeClr val="accent1"/>
+          </a:lnRef>
+          <a:fillRef idx="3">
+            <a:schemeClr val="accent1"/>
+          </a:fillRef>
+          <a:effectRef idx="2">
+            <a:schemeClr val="accent1"/>
+          </a:effectRef>
+          <a:fontRef idx="minor">
+            <a:schemeClr val="lt1"/>
+          </a:fontRef>
+        </p:style>
+        <p:txBody>
+          <a:bodyPr rtlCol="0" anchor="ctr" wrap="square" lIns="73152" rIns="73152" tIns="18288" bIns="18288"/>
+          <a:lstStyle/>
+          <a:p>
+            <a:pPr algn="l"/>
+            <a:r>
+              <a:rPr sz="1000" b="1">
+                <a:solidFill>
+                  <a:srgbClr val="664D00"/>
+                </a:solidFill>
+                <a:latin typeface="맑은 고딕"/>
+              </a:rPr>
+              <a:t>📎 사진 첨부: Voronoi 4-sublattice 모식도 (4a/4b/4c/4d)</a:t>
+            </a:r>
+          </a:p>
+        </p:txBody>
+      </p:sp>
     </p:spTree>
   </p:cSld>
   <p:clrMapOvr>
@@ -11755,6 +12140,61 @@
           </a:p>
         </p:txBody>
       </p:sp>
+      <p:sp>
+        <p:nvSpPr>
+          <p:cNvPr id="11" name="Rounded Rectangle 10"/>
+          <p:cNvSpPr/>
+          <p:nvPr/>
+        </p:nvSpPr>
+        <p:spPr>
+          <a:xfrm>
+            <a:off x="7528255" y="347472"/>
+            <a:ext cx="4206240" cy="384048"/>
+          </a:xfrm>
+          <a:prstGeom prst="roundRect">
+            <a:avLst/>
+          </a:prstGeom>
+          <a:solidFill>
+            <a:srgbClr val="FFF19A"/>
+          </a:solidFill>
+          <a:ln w="12700">
+            <a:solidFill>
+              <a:srgbClr val="C89A00"/>
+            </a:solidFill>
+          </a:ln>
+          <a:effectLst/>
+        </p:spPr>
+        <p:style>
+          <a:lnRef idx="1">
+            <a:schemeClr val="accent1"/>
+          </a:lnRef>
+          <a:fillRef idx="3">
+            <a:schemeClr val="accent1"/>
+          </a:fillRef>
+          <a:effectRef idx="2">
+            <a:schemeClr val="accent1"/>
+          </a:effectRef>
+          <a:fontRef idx="minor">
+            <a:schemeClr val="lt1"/>
+          </a:fontRef>
+        </p:style>
+        <p:txBody>
+          <a:bodyPr rtlCol="0" anchor="ctr" wrap="square" lIns="73152" rIns="73152" tIns="18288" bIns="18288"/>
+          <a:lstStyle/>
+          <a:p>
+            <a:pPr algn="l"/>
+            <a:r>
+              <a:rPr sz="1000" b="1">
+                <a:solidFill>
+                  <a:srgbClr val="664D00"/>
+                </a:solidFill>
+                <a:latin typeface="맑은 고딕"/>
+              </a:rPr>
+              <a:t>📎 사진 첨부: BVSE bimodal 에너지 분포 / pathway 맵</a:t>
+            </a:r>
+          </a:p>
+        </p:txBody>
+      </p:sp>
     </p:spTree>
   </p:cSld>
   <p:clrMapOvr>
@@ -12547,6 +12987,61 @@
                 <a:latin typeface="맑은 고딕"/>
               </a:rPr>
               <a:t>18 / 21</a:t>
+            </a:r>
+          </a:p>
+        </p:txBody>
+      </p:sp>
+      <p:sp>
+        <p:nvSpPr>
+          <p:cNvPr id="12" name="Rounded Rectangle 11"/>
+          <p:cNvSpPr/>
+          <p:nvPr/>
+        </p:nvSpPr>
+        <p:spPr>
+          <a:xfrm>
+            <a:off x="7528255" y="347472"/>
+            <a:ext cx="4206240" cy="384048"/>
+          </a:xfrm>
+          <a:prstGeom prst="roundRect">
+            <a:avLst/>
+          </a:prstGeom>
+          <a:solidFill>
+            <a:srgbClr val="FFF19A"/>
+          </a:solidFill>
+          <a:ln w="12700">
+            <a:solidFill>
+              <a:srgbClr val="C89A00"/>
+            </a:solidFill>
+          </a:ln>
+          <a:effectLst/>
+        </p:spPr>
+        <p:style>
+          <a:lnRef idx="1">
+            <a:schemeClr val="accent1"/>
+          </a:lnRef>
+          <a:fillRef idx="3">
+            <a:schemeClr val="accent1"/>
+          </a:fillRef>
+          <a:effectRef idx="2">
+            <a:schemeClr val="accent1"/>
+          </a:effectRef>
+          <a:fontRef idx="minor">
+            <a:schemeClr val="lt1"/>
+          </a:fontRef>
+        </p:style>
+        <p:txBody>
+          <a:bodyPr rtlCol="0" anchor="ctr" wrap="square" lIns="73152" rIns="73152" tIns="18288" bIns="18288"/>
+          <a:lstStyle/>
+          <a:p>
+            <a:pPr algn="l"/>
+            <a:r>
+              <a:rPr sz="1000" b="1">
+                <a:solidFill>
+                  <a:srgbClr val="664D00"/>
+                </a:solidFill>
+                <a:latin typeface="맑은 고딕"/>
+              </a:rPr>
+              <a:t>📎 사진 첨부: ELF isosurface (PS₄ covalent + Li–anion ionic)</a:t>
             </a:r>
           </a:p>
         </p:txBody>
@@ -13352,6 +13847,61 @@
           </a:p>
         </p:txBody>
       </p:sp>
+      <p:sp>
+        <p:nvSpPr>
+          <p:cNvPr id="11" name="Rounded Rectangle 10"/>
+          <p:cNvSpPr/>
+          <p:nvPr/>
+        </p:nvSpPr>
+        <p:spPr>
+          <a:xfrm>
+            <a:off x="7528255" y="347472"/>
+            <a:ext cx="4206240" cy="384048"/>
+          </a:xfrm>
+          <a:prstGeom prst="roundRect">
+            <a:avLst/>
+          </a:prstGeom>
+          <a:solidFill>
+            <a:srgbClr val="FFF19A"/>
+          </a:solidFill>
+          <a:ln w="12700">
+            <a:solidFill>
+              <a:srgbClr val="C89A00"/>
+            </a:solidFill>
+          </a:ln>
+          <a:effectLst/>
+        </p:spPr>
+        <p:style>
+          <a:lnRef idx="1">
+            <a:schemeClr val="accent1"/>
+          </a:lnRef>
+          <a:fillRef idx="3">
+            <a:schemeClr val="accent1"/>
+          </a:fillRef>
+          <a:effectRef idx="2">
+            <a:schemeClr val="accent1"/>
+          </a:effectRef>
+          <a:fontRef idx="minor">
+            <a:schemeClr val="lt1"/>
+          </a:fontRef>
+        </p:style>
+        <p:txBody>
+          <a:bodyPr rtlCol="0" anchor="ctr" wrap="square" lIns="73152" rIns="73152" tIns="18288" bIns="18288"/>
+          <a:lstStyle/>
+          <a:p>
+            <a:pPr algn="l"/>
+            <a:r>
+              <a:rPr sz="1000" b="1">
+                <a:solidFill>
+                  <a:srgbClr val="664D00"/>
+                </a:solidFill>
+                <a:latin typeface="맑은 고딕"/>
+              </a:rPr>
+              <a:t>📎 사진 첨부: k-mesh / LOBSTER spilling / AIMD 수렴 plot</a:t>
+            </a:r>
+          </a:p>
+        </p:txBody>
+      </p:sp>
     </p:spTree>
   </p:cSld>
   <p:clrMapOvr>
@@ -14068,6 +14618,61 @@
           </a:p>
         </p:txBody>
       </p:sp>
+      <p:sp>
+        <p:nvSpPr>
+          <p:cNvPr id="19" name="Rounded Rectangle 18"/>
+          <p:cNvSpPr/>
+          <p:nvPr/>
+        </p:nvSpPr>
+        <p:spPr>
+          <a:xfrm>
+            <a:off x="7528255" y="347472"/>
+            <a:ext cx="4206240" cy="384048"/>
+          </a:xfrm>
+          <a:prstGeom prst="roundRect">
+            <a:avLst/>
+          </a:prstGeom>
+          <a:solidFill>
+            <a:srgbClr val="FFF19A"/>
+          </a:solidFill>
+          <a:ln w="12700">
+            <a:solidFill>
+              <a:srgbClr val="C89A00"/>
+            </a:solidFill>
+          </a:ln>
+          <a:effectLst/>
+        </p:spPr>
+        <p:style>
+          <a:lnRef idx="1">
+            <a:schemeClr val="accent1"/>
+          </a:lnRef>
+          <a:fillRef idx="3">
+            <a:schemeClr val="accent1"/>
+          </a:fillRef>
+          <a:effectRef idx="2">
+            <a:schemeClr val="accent1"/>
+          </a:effectRef>
+          <a:fontRef idx="minor">
+            <a:schemeClr val="lt1"/>
+          </a:fontRef>
+        </p:style>
+        <p:txBody>
+          <a:bodyPr rtlCol="0" anchor="ctr" wrap="square" lIns="73152" rIns="73152" tIns="18288" bIns="18288"/>
+          <a:lstStyle/>
+          <a:p>
+            <a:pPr algn="l"/>
+            <a:r>
+              <a:rPr sz="1000" b="1">
+                <a:solidFill>
+                  <a:srgbClr val="664D00"/>
+                </a:solidFill>
+                <a:latin typeface="맑은 고딕"/>
+              </a:rPr>
+              <a:t>📎 사진 첨부: LPSCl F-43m vs LPSCl₁.₆ R3m 결정구조 (VESTA, 동일 시점)</a:t>
+            </a:r>
+          </a:p>
+        </p:txBody>
+      </p:sp>
     </p:spTree>
   </p:cSld>
   <p:clrMapOvr>
@@ -15552,6 +16157,61 @@
           </a:p>
         </p:txBody>
       </p:sp>
+      <p:sp>
+        <p:nvSpPr>
+          <p:cNvPr id="11" name="Rounded Rectangle 10"/>
+          <p:cNvSpPr/>
+          <p:nvPr/>
+        </p:nvSpPr>
+        <p:spPr>
+          <a:xfrm>
+            <a:off x="7528255" y="347472"/>
+            <a:ext cx="4206240" cy="384048"/>
+          </a:xfrm>
+          <a:prstGeom prst="roundRect">
+            <a:avLst/>
+          </a:prstGeom>
+          <a:solidFill>
+            <a:srgbClr val="FFF19A"/>
+          </a:solidFill>
+          <a:ln w="12700">
+            <a:solidFill>
+              <a:srgbClr val="C89A00"/>
+            </a:solidFill>
+          </a:ln>
+          <a:effectLst/>
+        </p:spPr>
+        <p:style>
+          <a:lnRef idx="1">
+            <a:schemeClr val="accent1"/>
+          </a:lnRef>
+          <a:fillRef idx="3">
+            <a:schemeClr val="accent1"/>
+          </a:fillRef>
+          <a:effectRef idx="2">
+            <a:schemeClr val="accent1"/>
+          </a:effectRef>
+          <a:fontRef idx="minor">
+            <a:schemeClr val="lt1"/>
+          </a:fontRef>
+        </p:style>
+        <p:txBody>
+          <a:bodyPr rtlCol="0" anchor="ctr" wrap="square" lIns="73152" rIns="73152" tIns="18288" bIns="18288"/>
+          <a:lstStyle/>
+          <a:p>
+            <a:pPr algn="l"/>
+            <a:r>
+              <a:rPr sz="1000" b="1">
+                <a:solidFill>
+                  <a:srgbClr val="664D00"/>
+                </a:solidFill>
+                <a:latin typeface="맑은 고딕"/>
+              </a:rPr>
+              <a:t>📎 사진 첨부: 3-probe (BVSE · NEB · MD) 수렴 schematic</a:t>
+            </a:r>
+          </a:p>
+        </p:txBody>
+      </p:sp>
     </p:spTree>
   </p:cSld>
   <p:clrMapOvr>
@@ -16252,6 +16912,61 @@
           </a:p>
         </p:txBody>
       </p:sp>
+      <p:sp>
+        <p:nvSpPr>
+          <p:cNvPr id="8" name="Rounded Rectangle 7"/>
+          <p:cNvSpPr/>
+          <p:nvPr/>
+        </p:nvSpPr>
+        <p:spPr>
+          <a:xfrm>
+            <a:off x="7528255" y="347472"/>
+            <a:ext cx="4206240" cy="384048"/>
+          </a:xfrm>
+          <a:prstGeom prst="roundRect">
+            <a:avLst/>
+          </a:prstGeom>
+          <a:solidFill>
+            <a:srgbClr val="FFF19A"/>
+          </a:solidFill>
+          <a:ln w="12700">
+            <a:solidFill>
+              <a:srgbClr val="C89A00"/>
+            </a:solidFill>
+          </a:ln>
+          <a:effectLst/>
+        </p:spPr>
+        <p:style>
+          <a:lnRef idx="1">
+            <a:schemeClr val="accent1"/>
+          </a:lnRef>
+          <a:fillRef idx="3">
+            <a:schemeClr val="accent1"/>
+          </a:fillRef>
+          <a:effectRef idx="2">
+            <a:schemeClr val="accent1"/>
+          </a:effectRef>
+          <a:fontRef idx="minor">
+            <a:schemeClr val="lt1"/>
+          </a:fontRef>
+        </p:style>
+        <p:txBody>
+          <a:bodyPr rtlCol="0" anchor="ctr" wrap="square" lIns="73152" rIns="73152" tIns="18288" bIns="18288"/>
+          <a:lstStyle/>
+          <a:p>
+            <a:pPr algn="l"/>
+            <a:r>
+              <a:rPr sz="1000" b="1">
+                <a:solidFill>
+                  <a:srgbClr val="664D00"/>
+                </a:solidFill>
+                <a:latin typeface="맑은 고딕"/>
+              </a:rPr>
+              <a:t>📎 사진 첨부: Oxidation 4-axis radar 또는 grid</a:t>
+            </a:r>
+          </a:p>
+        </p:txBody>
+      </p:sp>
     </p:spTree>
   </p:cSld>
   <p:clrMapOvr>
@@ -17178,6 +17893,61 @@
                 <a:latin typeface="맑은 고딕"/>
               </a:rPr>
               <a:t>23 / 21</a:t>
+            </a:r>
+          </a:p>
+        </p:txBody>
+      </p:sp>
+      <p:sp>
+        <p:nvSpPr>
+          <p:cNvPr id="11" name="Rounded Rectangle 10"/>
+          <p:cNvSpPr/>
+          <p:nvPr/>
+        </p:nvSpPr>
+        <p:spPr>
+          <a:xfrm>
+            <a:off x="7528255" y="347472"/>
+            <a:ext cx="4206240" cy="384048"/>
+          </a:xfrm>
+          <a:prstGeom prst="roundRect">
+            <a:avLst/>
+          </a:prstGeom>
+          <a:solidFill>
+            <a:srgbClr val="FFF19A"/>
+          </a:solidFill>
+          <a:ln w="12700">
+            <a:solidFill>
+              <a:srgbClr val="C89A00"/>
+            </a:solidFill>
+          </a:ln>
+          <a:effectLst/>
+        </p:spPr>
+        <p:style>
+          <a:lnRef idx="1">
+            <a:schemeClr val="accent1"/>
+          </a:lnRef>
+          <a:fillRef idx="3">
+            <a:schemeClr val="accent1"/>
+          </a:fillRef>
+          <a:effectRef idx="2">
+            <a:schemeClr val="accent1"/>
+          </a:effectRef>
+          <a:fontRef idx="minor">
+            <a:schemeClr val="lt1"/>
+          </a:fontRef>
+        </p:style>
+        <p:txBody>
+          <a:bodyPr rtlCol="0" anchor="ctr" wrap="square" lIns="73152" rIns="73152" tIns="18288" bIns="18288"/>
+          <a:lstStyle/>
+          <a:p>
+            <a:pPr algn="l"/>
+            <a:r>
+              <a:rPr sz="1000" b="1">
+                <a:solidFill>
+                  <a:srgbClr val="664D00"/>
+                </a:solidFill>
+                <a:latin typeface="맑은 고딕"/>
+              </a:rPr>
+              <a:t>📎 사진 첨부: Constrained ESW Cl-scan + 분해반응 ΔG 막대</a:t>
             </a:r>
           </a:p>
         </p:txBody>
@@ -19407,6 +20177,61 @@
           </a:p>
         </p:txBody>
       </p:sp>
+      <p:sp>
+        <p:nvSpPr>
+          <p:cNvPr id="14" name="Rounded Rectangle 13"/>
+          <p:cNvSpPr/>
+          <p:nvPr/>
+        </p:nvSpPr>
+        <p:spPr>
+          <a:xfrm>
+            <a:off x="7528255" y="347472"/>
+            <a:ext cx="4206240" cy="384048"/>
+          </a:xfrm>
+          <a:prstGeom prst="roundRect">
+            <a:avLst/>
+          </a:prstGeom>
+          <a:solidFill>
+            <a:srgbClr val="FFF19A"/>
+          </a:solidFill>
+          <a:ln w="12700">
+            <a:solidFill>
+              <a:srgbClr val="C89A00"/>
+            </a:solidFill>
+          </a:ln>
+          <a:effectLst/>
+        </p:spPr>
+        <p:style>
+          <a:lnRef idx="1">
+            <a:schemeClr val="accent1"/>
+          </a:lnRef>
+          <a:fillRef idx="3">
+            <a:schemeClr val="accent1"/>
+          </a:fillRef>
+          <a:effectRef idx="2">
+            <a:schemeClr val="accent1"/>
+          </a:effectRef>
+          <a:fontRef idx="minor">
+            <a:schemeClr val="lt1"/>
+          </a:fontRef>
+        </p:style>
+        <p:txBody>
+          <a:bodyPr rtlCol="0" anchor="ctr" wrap="square" lIns="73152" rIns="73152" tIns="18288" bIns="18288"/>
+          <a:lstStyle/>
+          <a:p>
+            <a:pPr algn="l"/>
+            <a:r>
+              <a:rPr sz="1000" b="1">
+                <a:solidFill>
+                  <a:srgbClr val="664D00"/>
+                </a:solidFill>
+                <a:latin typeface="맑은 고딕"/>
+              </a:rPr>
+              <a:t>📎 사진 첨부: Trade-off 4축 + Paper #2 도핑 roadmap</a:t>
+            </a:r>
+          </a:p>
+        </p:txBody>
+      </p:sp>
     </p:spTree>
   </p:cSld>
   <p:clrMapOvr>
@@ -20206,6 +21031,61 @@
           </a:p>
         </p:txBody>
       </p:sp>
+      <p:sp>
+        <p:nvSpPr>
+          <p:cNvPr id="19" name="Rounded Rectangle 18"/>
+          <p:cNvSpPr/>
+          <p:nvPr/>
+        </p:nvSpPr>
+        <p:spPr>
+          <a:xfrm>
+            <a:off x="7528255" y="347472"/>
+            <a:ext cx="4206240" cy="384048"/>
+          </a:xfrm>
+          <a:prstGeom prst="roundRect">
+            <a:avLst/>
+          </a:prstGeom>
+          <a:solidFill>
+            <a:srgbClr val="FFF19A"/>
+          </a:solidFill>
+          <a:ln w="12700">
+            <a:solidFill>
+              <a:srgbClr val="C89A00"/>
+            </a:solidFill>
+          </a:ln>
+          <a:effectLst/>
+        </p:spPr>
+        <p:style>
+          <a:lnRef idx="1">
+            <a:schemeClr val="accent1"/>
+          </a:lnRef>
+          <a:fillRef idx="3">
+            <a:schemeClr val="accent1"/>
+          </a:fillRef>
+          <a:effectRef idx="2">
+            <a:schemeClr val="accent1"/>
+          </a:effectRef>
+          <a:fontRef idx="minor">
+            <a:schemeClr val="lt1"/>
+          </a:fontRef>
+        </p:style>
+        <p:txBody>
+          <a:bodyPr rtlCol="0" anchor="ctr" wrap="square" lIns="73152" rIns="73152" tIns="18288" bIns="18288"/>
+          <a:lstStyle/>
+          <a:p>
+            <a:pPr algn="l"/>
+            <a:r>
+              <a:rPr sz="1000" b="1">
+                <a:solidFill>
+                  <a:srgbClr val="664D00"/>
+                </a:solidFill>
+                <a:latin typeface="맑은 고딕"/>
+              </a:rPr>
+              <a:t>📎 사진 첨부: 3-tier pipeline 모식도 (선택)</a:t>
+            </a:r>
+          </a:p>
+        </p:txBody>
+      </p:sp>
     </p:spTree>
   </p:cSld>
   <p:clrMapOvr>
@@ -21367,6 +22247,61 @@
                 <a:latin typeface="맑은 고딕"/>
               </a:rPr>
               <a:t>4 / 21</a:t>
+            </a:r>
+          </a:p>
+        </p:txBody>
+      </p:sp>
+      <p:sp>
+        <p:nvSpPr>
+          <p:cNvPr id="9" name="Rounded Rectangle 8"/>
+          <p:cNvSpPr/>
+          <p:nvPr/>
+        </p:nvSpPr>
+        <p:spPr>
+          <a:xfrm>
+            <a:off x="7528255" y="347472"/>
+            <a:ext cx="4206240" cy="384048"/>
+          </a:xfrm>
+          <a:prstGeom prst="roundRect">
+            <a:avLst/>
+          </a:prstGeom>
+          <a:solidFill>
+            <a:srgbClr val="FFF19A"/>
+          </a:solidFill>
+          <a:ln w="12700">
+            <a:solidFill>
+              <a:srgbClr val="C89A00"/>
+            </a:solidFill>
+          </a:ln>
+          <a:effectLst/>
+        </p:spPr>
+        <p:style>
+          <a:lnRef idx="1">
+            <a:schemeClr val="accent1"/>
+          </a:lnRef>
+          <a:fillRef idx="3">
+            <a:schemeClr val="accent1"/>
+          </a:fillRef>
+          <a:effectRef idx="2">
+            <a:schemeClr val="accent1"/>
+          </a:effectRef>
+          <a:fontRef idx="minor">
+            <a:schemeClr val="lt1"/>
+          </a:fontRef>
+        </p:style>
+        <p:txBody>
+          <a:bodyPr rtlCol="0" anchor="ctr" wrap="square" lIns="73152" rIns="73152" tIns="18288" bIns="18288"/>
+          <a:lstStyle/>
+          <a:p>
+            <a:pPr algn="l"/>
+            <a:r>
+              <a:rPr sz="1000" b="1">
+                <a:solidFill>
+                  <a:srgbClr val="664D00"/>
+                </a:solidFill>
+                <a:latin typeface="맑은 고딕"/>
+              </a:rPr>
+              <a:t>📎 사진 첨부: 4-message at-a-glance figure</a:t>
             </a:r>
           </a:p>
         </p:txBody>
@@ -22320,6 +23255,61 @@
           </a:p>
         </p:txBody>
       </p:sp>
+      <p:sp>
+        <p:nvSpPr>
+          <p:cNvPr id="11" name="Rounded Rectangle 10"/>
+          <p:cNvSpPr/>
+          <p:nvPr/>
+        </p:nvSpPr>
+        <p:spPr>
+          <a:xfrm>
+            <a:off x="7528255" y="347472"/>
+            <a:ext cx="4206240" cy="384048"/>
+          </a:xfrm>
+          <a:prstGeom prst="roundRect">
+            <a:avLst/>
+          </a:prstGeom>
+          <a:solidFill>
+            <a:srgbClr val="FFF19A"/>
+          </a:solidFill>
+          <a:ln w="12700">
+            <a:solidFill>
+              <a:srgbClr val="C89A00"/>
+            </a:solidFill>
+          </a:ln>
+          <a:effectLst/>
+        </p:spPr>
+        <p:style>
+          <a:lnRef idx="1">
+            <a:schemeClr val="accent1"/>
+          </a:lnRef>
+          <a:fillRef idx="3">
+            <a:schemeClr val="accent1"/>
+          </a:fillRef>
+          <a:effectRef idx="2">
+            <a:schemeClr val="accent1"/>
+          </a:effectRef>
+          <a:fontRef idx="minor">
+            <a:schemeClr val="lt1"/>
+          </a:fontRef>
+        </p:style>
+        <p:txBody>
+          <a:bodyPr rtlCol="0" anchor="ctr" wrap="square" lIns="73152" rIns="73152" tIns="18288" bIns="18288"/>
+          <a:lstStyle/>
+          <a:p>
+            <a:pPr algn="l"/>
+            <a:r>
+              <a:rPr sz="1000" b="1">
+                <a:solidFill>
+                  <a:srgbClr val="664D00"/>
+                </a:solidFill>
+                <a:latin typeface="맑은 고딕"/>
+              </a:rPr>
+              <a:t>📎 사진 첨부: PDOS 비교 (comp1 vs modelc, atom-projected)</a:t>
+            </a:r>
+          </a:p>
+        </p:txBody>
+      </p:sp>
     </p:spTree>
   </p:cSld>
   <p:clrMapOvr>
@@ -23277,6 +24267,61 @@
           </a:p>
         </p:txBody>
       </p:sp>
+      <p:sp>
+        <p:nvSpPr>
+          <p:cNvPr id="12" name="Rounded Rectangle 11"/>
+          <p:cNvSpPr/>
+          <p:nvPr/>
+        </p:nvSpPr>
+        <p:spPr>
+          <a:xfrm>
+            <a:off x="7528255" y="347472"/>
+            <a:ext cx="4206240" cy="384048"/>
+          </a:xfrm>
+          <a:prstGeom prst="roundRect">
+            <a:avLst/>
+          </a:prstGeom>
+          <a:solidFill>
+            <a:srgbClr val="FFF19A"/>
+          </a:solidFill>
+          <a:ln w="12700">
+            <a:solidFill>
+              <a:srgbClr val="C89A00"/>
+            </a:solidFill>
+          </a:ln>
+          <a:effectLst/>
+        </p:spPr>
+        <p:style>
+          <a:lnRef idx="1">
+            <a:schemeClr val="accent1"/>
+          </a:lnRef>
+          <a:fillRef idx="3">
+            <a:schemeClr val="accent1"/>
+          </a:fillRef>
+          <a:effectRef idx="2">
+            <a:schemeClr val="accent1"/>
+          </a:effectRef>
+          <a:fontRef idx="minor">
+            <a:schemeClr val="lt1"/>
+          </a:fontRef>
+        </p:style>
+        <p:txBody>
+          <a:bodyPr rtlCol="0" anchor="ctr" wrap="square" lIns="73152" rIns="73152" tIns="18288" bIns="18288"/>
+          <a:lstStyle/>
+          <a:p>
+            <a:pPr algn="l"/>
+            <a:r>
+              <a:rPr sz="1000" b="1">
+                <a:solidFill>
+                  <a:srgbClr val="664D00"/>
+                </a:solidFill>
+                <a:latin typeface="맑은 고딕"/>
+              </a:rPr>
+              <a:t>📎 사진 첨부: σ(T) Arrhenius plot (paired 600/800/1000 K)</a:t>
+            </a:r>
+          </a:p>
+        </p:txBody>
+      </p:sp>
     </p:spTree>
   </p:cSld>
   <p:clrMapOvr>
@@ -23910,6 +24955,61 @@
           </a:p>
         </p:txBody>
       </p:sp>
+      <p:sp>
+        <p:nvSpPr>
+          <p:cNvPr id="15" name="Rounded Rectangle 14"/>
+          <p:cNvSpPr/>
+          <p:nvPr/>
+        </p:nvSpPr>
+        <p:spPr>
+          <a:xfrm>
+            <a:off x="7528255" y="347472"/>
+            <a:ext cx="4206240" cy="384048"/>
+          </a:xfrm>
+          <a:prstGeom prst="roundRect">
+            <a:avLst/>
+          </a:prstGeom>
+          <a:solidFill>
+            <a:srgbClr val="FFF19A"/>
+          </a:solidFill>
+          <a:ln w="12700">
+            <a:solidFill>
+              <a:srgbClr val="C89A00"/>
+            </a:solidFill>
+          </a:ln>
+          <a:effectLst/>
+        </p:spPr>
+        <p:style>
+          <a:lnRef idx="1">
+            <a:schemeClr val="accent1"/>
+          </a:lnRef>
+          <a:fillRef idx="3">
+            <a:schemeClr val="accent1"/>
+          </a:fillRef>
+          <a:effectRef idx="2">
+            <a:schemeClr val="accent1"/>
+          </a:effectRef>
+          <a:fontRef idx="minor">
+            <a:schemeClr val="lt1"/>
+          </a:fontRef>
+        </p:style>
+        <p:txBody>
+          <a:bodyPr rtlCol="0" anchor="ctr" wrap="square" lIns="73152" rIns="73152" tIns="18288" bIns="18288"/>
+          <a:lstStyle/>
+          <a:p>
+            <a:pPr algn="l"/>
+            <a:r>
+              <a:rPr sz="1000" b="1">
+                <a:solidFill>
+                  <a:srgbClr val="664D00"/>
+                </a:solidFill>
+                <a:latin typeface="맑은 고딕"/>
+              </a:rPr>
+              <a:t>📎 사진 첨부: D₀ vs Eₐ 산점도 또는 prefactor 비교 막대</a:t>
+            </a:r>
+          </a:p>
+        </p:txBody>
+      </p:sp>
     </p:spTree>
   </p:cSld>
   <p:clrMapOvr>
@@ -24494,6 +25594,61 @@
           </a:p>
         </p:txBody>
       </p:sp>
+      <p:sp>
+        <p:nvSpPr>
+          <p:cNvPr id="9" name="Rounded Rectangle 8"/>
+          <p:cNvSpPr/>
+          <p:nvPr/>
+        </p:nvSpPr>
+        <p:spPr>
+          <a:xfrm>
+            <a:off x="7528255" y="347472"/>
+            <a:ext cx="4206240" cy="384048"/>
+          </a:xfrm>
+          <a:prstGeom prst="roundRect">
+            <a:avLst/>
+          </a:prstGeom>
+          <a:solidFill>
+            <a:srgbClr val="FFF19A"/>
+          </a:solidFill>
+          <a:ln w="12700">
+            <a:solidFill>
+              <a:srgbClr val="C89A00"/>
+            </a:solidFill>
+          </a:ln>
+          <a:effectLst/>
+        </p:spPr>
+        <p:style>
+          <a:lnRef idx="1">
+            <a:schemeClr val="accent1"/>
+          </a:lnRef>
+          <a:fillRef idx="3">
+            <a:schemeClr val="accent1"/>
+          </a:fillRef>
+          <a:effectRef idx="2">
+            <a:schemeClr val="accent1"/>
+          </a:effectRef>
+          <a:fontRef idx="minor">
+            <a:schemeClr val="lt1"/>
+          </a:fontRef>
+        </p:style>
+        <p:txBody>
+          <a:bodyPr rtlCol="0" anchor="ctr" wrap="square" lIns="73152" rIns="73152" tIns="18288" bIns="18288"/>
+          <a:lstStyle/>
+          <a:p>
+            <a:pPr algn="l"/>
+            <a:r>
+              <a:rPr sz="1000" b="1">
+                <a:solidFill>
+                  <a:srgbClr val="664D00"/>
+                </a:solidFill>
+                <a:latin typeface="맑은 고딕"/>
+              </a:rPr>
+              <a:t>📎 사진 첨부: Disorder ensemble Eₐ 분포 (matched-d 그룹)</a:t>
+            </a:r>
+          </a:p>
+        </p:txBody>
+      </p:sp>
     </p:spTree>
   </p:cSld>
   <p:clrMapOvr>
@@ -25653,6 +26808,61 @@
                 <a:latin typeface="맑은 고딕"/>
               </a:rPr>
               <a:t>9 / 21</a:t>
+            </a:r>
+          </a:p>
+        </p:txBody>
+      </p:sp>
+      <p:sp>
+        <p:nvSpPr>
+          <p:cNvPr id="8" name="Rounded Rectangle 7"/>
+          <p:cNvSpPr/>
+          <p:nvPr/>
+        </p:nvSpPr>
+        <p:spPr>
+          <a:xfrm>
+            <a:off x="7528255" y="347472"/>
+            <a:ext cx="4206240" cy="384048"/>
+          </a:xfrm>
+          <a:prstGeom prst="roundRect">
+            <a:avLst/>
+          </a:prstGeom>
+          <a:solidFill>
+            <a:srgbClr val="FFF19A"/>
+          </a:solidFill>
+          <a:ln w="12700">
+            <a:solidFill>
+              <a:srgbClr val="C89A00"/>
+            </a:solidFill>
+          </a:ln>
+          <a:effectLst/>
+        </p:spPr>
+        <p:style>
+          <a:lnRef idx="1">
+            <a:schemeClr val="accent1"/>
+          </a:lnRef>
+          <a:fillRef idx="3">
+            <a:schemeClr val="accent1"/>
+          </a:fillRef>
+          <a:effectRef idx="2">
+            <a:schemeClr val="accent1"/>
+          </a:effectRef>
+          <a:fontRef idx="minor">
+            <a:schemeClr val="lt1"/>
+          </a:fontRef>
+        </p:style>
+        <p:txBody>
+          <a:bodyPr rtlCol="0" anchor="ctr" wrap="square" lIns="73152" rIns="73152" tIns="18288" bIns="18288"/>
+          <a:lstStyle/>
+          <a:p>
+            <a:pPr algn="l"/>
+            <a:r>
+              <a:rPr sz="1000" b="1">
+                <a:solidFill>
+                  <a:srgbClr val="664D00"/>
+                </a:solidFill>
+                <a:latin typeface="맑은 고딕"/>
+              </a:rPr>
+              <a:t>📎 사진 첨부: σ(T) 저온 외삽 plot (300 K까지)</a:t>
             </a:r>
           </a:p>
         </p:txBody>

--- a/kb/papers/lpscl_vs_lpscl16_seminar_v1.pptx
+++ b/kb/papers/lpscl_vs_lpscl16_seminar_v1.pptx
@@ -4580,7 +4580,7 @@
                 </a:solidFill>
                 <a:latin typeface="맑은 고딕"/>
               </a:rPr>
-              <a:t>10 / 21</a:t>
+              <a:t>10 / 26</a:t>
             </a:r>
           </a:p>
         </p:txBody>
@@ -4593,8 +4593,8 @@
         </p:nvSpPr>
         <p:spPr>
           <a:xfrm>
-            <a:off x="7528255" y="347472"/>
-            <a:ext cx="4206240" cy="384048"/>
+            <a:off x="6933895" y="27432"/>
+            <a:ext cx="5120640" cy="274320"/>
           </a:xfrm>
           <a:prstGeom prst="roundRect">
             <a:avLst/>
@@ -4624,18 +4624,18 @@
           </a:fontRef>
         </p:style>
         <p:txBody>
-          <a:bodyPr rtlCol="0" anchor="ctr" wrap="square" lIns="73152" rIns="73152" tIns="18288" bIns="18288"/>
-          <a:lstStyle/>
-          <a:p>
-            <a:pPr algn="l"/>
-            <a:r>
-              <a:rPr sz="1000" b="1">
+          <a:bodyPr rtlCol="0" anchor="ctr" wrap="none" lIns="73152" rIns="73152" tIns="9144" bIns="9144"/>
+          <a:lstStyle/>
+          <a:p>
+            <a:pPr algn="ctr"/>
+            <a:r>
+              <a:rPr sz="900" b="1">
                 <a:solidFill>
                   <a:srgbClr val="664D00"/>
                 </a:solidFill>
                 <a:latin typeface="맑은 고딕"/>
               </a:rPr>
-              <a:t>📎 사진 첨부: Cohesive / Li–anion ionic glue 모식도 또는 막대</a:t>
+              <a:t>📎 사진 첨부: Li–anion ionic glue 막대/모식도</a:t>
             </a:r>
           </a:p>
         </p:txBody>
@@ -5968,7 +5968,7 @@
                 </a:solidFill>
                 <a:latin typeface="맑은 고딕"/>
               </a:rPr>
-              <a:t>11 / 21</a:t>
+              <a:t>11 / 26</a:t>
             </a:r>
           </a:p>
         </p:txBody>
@@ -5981,8 +5981,8 @@
         </p:nvSpPr>
         <p:spPr>
           <a:xfrm>
-            <a:off x="7528255" y="347472"/>
-            <a:ext cx="4206240" cy="384048"/>
+            <a:off x="6933895" y="27432"/>
+            <a:ext cx="5120640" cy="274320"/>
           </a:xfrm>
           <a:prstGeom prst="roundRect">
             <a:avLst/>
@@ -6012,18 +6012,18 @@
           </a:fontRef>
         </p:style>
         <p:txBody>
-          <a:bodyPr rtlCol="0" anchor="ctr" wrap="square" lIns="73152" rIns="73152" tIns="18288" bIns="18288"/>
-          <a:lstStyle/>
-          <a:p>
-            <a:pPr algn="l"/>
-            <a:r>
-              <a:rPr sz="1000" b="1">
+          <a:bodyPr rtlCol="0" anchor="ctr" wrap="none" lIns="73152" rIns="73152" tIns="9144" bIns="9144"/>
+          <a:lstStyle/>
+          <a:p>
+            <a:pPr algn="ctr"/>
+            <a:r>
+              <a:rPr sz="900" b="1">
                 <a:solidFill>
                   <a:srgbClr val="664D00"/>
                 </a:solidFill>
                 <a:latin typeface="맑은 고딕"/>
               </a:rPr>
-              <a:t>📎 사진 첨부: Elastic moduli (B, G, E) clamped vs relaxed 비교 막대</a:t>
+              <a:t>📎 사진 첨부: B·G·E clamped vs relaxed 막대</a:t>
             </a:r>
           </a:p>
         </p:txBody>
@@ -7015,7 +7015,7 @@
                 </a:solidFill>
                 <a:latin typeface="맑은 고딕"/>
               </a:rPr>
-              <a:t>12 / 21</a:t>
+              <a:t>12 / 26</a:t>
             </a:r>
           </a:p>
         </p:txBody>
@@ -7028,8 +7028,8 @@
         </p:nvSpPr>
         <p:spPr>
           <a:xfrm>
-            <a:off x="7528255" y="347472"/>
-            <a:ext cx="4206240" cy="384048"/>
+            <a:off x="6933895" y="27432"/>
+            <a:ext cx="5120640" cy="274320"/>
           </a:xfrm>
           <a:prstGeom prst="roundRect">
             <a:avLst/>
@@ -7059,12 +7059,12 @@
           </a:fontRef>
         </p:style>
         <p:txBody>
-          <a:bodyPr rtlCol="0" anchor="ctr" wrap="square" lIns="73152" rIns="73152" tIns="18288" bIns="18288"/>
-          <a:lstStyle/>
-          <a:p>
-            <a:pPr algn="l"/>
-            <a:r>
-              <a:rPr sz="1000" b="1">
+          <a:bodyPr rtlCol="0" anchor="ctr" wrap="none" lIns="73152" rIns="73152" tIns="9144" bIns="9144"/>
+          <a:lstStyle/>
+          <a:p>
+            <a:pPr algn="ctr"/>
+            <a:r>
+              <a:rPr sz="900" b="1">
                 <a:solidFill>
                   <a:srgbClr val="664D00"/>
                 </a:solidFill>
@@ -7191,11 +7191,11 @@
                 <a:tableStyleId>{5C22544A-7EE6-4342-B048-85BDC9FD1C3A}</a:tableStyleId>
               </a:tblPr>
               <a:tblGrid>
-                <a:gridCol w="2267712"/>
-                <a:gridCol w="2267712"/>
-                <a:gridCol w="2267712"/>
-                <a:gridCol w="2267712"/>
-                <a:gridCol w="2267712"/>
+                <a:gridCol w="548640"/>
+                <a:gridCol w="3840480"/>
+                <a:gridCol w="2286000"/>
+                <a:gridCol w="2286000"/>
+                <a:gridCol w="2377440"/>
               </a:tblGrid>
               <a:tr h="822960">
                 <a:tc>
@@ -7870,7 +7870,7 @@
                 </a:solidFill>
                 <a:latin typeface="맑은 고딕"/>
               </a:rPr>
-              <a:t>13 / 21</a:t>
+              <a:t>13 / 26</a:t>
             </a:r>
           </a:p>
         </p:txBody>
@@ -7883,8 +7883,8 @@
         </p:nvSpPr>
         <p:spPr>
           <a:xfrm>
-            <a:off x="7528255" y="347472"/>
-            <a:ext cx="4206240" cy="384048"/>
+            <a:off x="6933895" y="27432"/>
+            <a:ext cx="5120640" cy="274320"/>
           </a:xfrm>
           <a:prstGeom prst="roundRect">
             <a:avLst/>
@@ -7914,18 +7914,18 @@
           </a:fontRef>
         </p:style>
         <p:txBody>
-          <a:bodyPr rtlCol="0" anchor="ctr" wrap="square" lIns="73152" rIns="73152" tIns="18288" bIns="18288"/>
-          <a:lstStyle/>
-          <a:p>
-            <a:pPr algn="l"/>
-            <a:r>
-              <a:rPr sz="1000" b="1">
+          <a:bodyPr rtlCol="0" anchor="ctr" wrap="none" lIns="73152" rIns="73152" tIns="9144" bIns="9144"/>
+          <a:lstStyle/>
+          <a:p>
+            <a:pPr algn="ctr"/>
+            <a:r>
+              <a:rPr sz="900" b="1">
                 <a:solidFill>
                   <a:srgbClr val="664D00"/>
                 </a:solidFill>
                 <a:latin typeface="맑은 고딕"/>
               </a:rPr>
-              <a:t>📎 사진 첨부: M4 4 cross-check 수렴 그림</a:t>
+              <a:t>📎 사진 첨부: M4 cross-check 수렴 그림</a:t>
             </a:r>
           </a:p>
         </p:txBody>
@@ -8934,7 +8934,7 @@
                 </a:solidFill>
                 <a:latin typeface="맑은 고딕"/>
               </a:rPr>
-              <a:t>14 / 21</a:t>
+              <a:t>14 / 26</a:t>
             </a:r>
           </a:p>
         </p:txBody>
@@ -8947,8 +8947,8 @@
         </p:nvSpPr>
         <p:spPr>
           <a:xfrm>
-            <a:off x="7528255" y="347472"/>
-            <a:ext cx="4206240" cy="384048"/>
+            <a:off x="6933895" y="27432"/>
+            <a:ext cx="5120640" cy="274320"/>
           </a:xfrm>
           <a:prstGeom prst="roundRect">
             <a:avLst/>
@@ -8978,18 +8978,18 @@
           </a:fontRef>
         </p:style>
         <p:txBody>
-          <a:bodyPr rtlCol="0" anchor="ctr" wrap="square" lIns="73152" rIns="73152" tIns="18288" bIns="18288"/>
-          <a:lstStyle/>
-          <a:p>
-            <a:pPr algn="l"/>
-            <a:r>
-              <a:rPr sz="1000" b="1">
+          <a:bodyPr rtlCol="0" anchor="ctr" wrap="none" lIns="73152" rIns="73152" tIns="9144" bIns="9144"/>
+          <a:lstStyle/>
+          <a:p>
+            <a:pPr algn="ctr"/>
+            <a:r>
+              <a:rPr sz="900" b="1">
                 <a:solidFill>
                   <a:srgbClr val="664D00"/>
                 </a:solidFill>
                 <a:latin typeface="맑은 고딕"/>
               </a:rPr>
-              <a:t>📎 사진 첨부: PS₄ 결합 길이/각도 히스토그램 (두 시스템 overlay)</a:t>
+              <a:t>📎 사진 첨부: PS₄ 결합 히스토그램 overlay</a:t>
             </a:r>
           </a:p>
         </p:txBody>
@@ -10154,7 +10154,7 @@
                 </a:solidFill>
                 <a:latin typeface="맑은 고딕"/>
               </a:rPr>
-              <a:t>15 / 21</a:t>
+              <a:t>15 / 26</a:t>
             </a:r>
           </a:p>
         </p:txBody>
@@ -10167,8 +10167,8 @@
         </p:nvSpPr>
         <p:spPr>
           <a:xfrm>
-            <a:off x="7528255" y="347472"/>
-            <a:ext cx="4206240" cy="384048"/>
+            <a:off x="6933895" y="27432"/>
+            <a:ext cx="5120640" cy="274320"/>
           </a:xfrm>
           <a:prstGeom prst="roundRect">
             <a:avLst/>
@@ -10198,18 +10198,18 @@
           </a:fontRef>
         </p:style>
         <p:txBody>
-          <a:bodyPr rtlCol="0" anchor="ctr" wrap="square" lIns="73152" rIns="73152" tIns="18288" bIns="18288"/>
-          <a:lstStyle/>
-          <a:p>
-            <a:pPr algn="l"/>
-            <a:r>
-              <a:rPr sz="1000" b="1">
+          <a:bodyPr rtlCol="0" anchor="ctr" wrap="none" lIns="73152" rIns="73152" tIns="9144" bIns="9144"/>
+          <a:lstStyle/>
+          <a:p>
+            <a:pPr algn="ctr"/>
+            <a:r>
+              <a:rPr sz="900" b="1">
                 <a:solidFill>
                   <a:srgbClr val="664D00"/>
                 </a:solidFill>
                 <a:latin typeface="맑은 고딕"/>
               </a:rPr>
-              <a:t>📎 사진 첨부: Li–Cl per-bond 히스토그램 (4a vs 4d-AS 분리)</a:t>
+              <a:t>📎 사진 첨부: Li–Cl per-bond 히스토그램 (4a/4d)</a:t>
             </a:r>
           </a:p>
         </p:txBody>
@@ -11150,7 +11150,7 @@
                 </a:solidFill>
                 <a:latin typeface="맑은 고딕"/>
               </a:rPr>
-              <a:t>16 / 21</a:t>
+              <a:t>16 / 26</a:t>
             </a:r>
           </a:p>
         </p:txBody>
@@ -11163,8 +11163,8 @@
         </p:nvSpPr>
         <p:spPr>
           <a:xfrm>
-            <a:off x="7528255" y="347472"/>
-            <a:ext cx="4206240" cy="384048"/>
+            <a:off x="6933895" y="27432"/>
+            <a:ext cx="5120640" cy="274320"/>
           </a:xfrm>
           <a:prstGeom prst="roundRect">
             <a:avLst/>
@@ -11194,18 +11194,18 @@
           </a:fontRef>
         </p:style>
         <p:txBody>
-          <a:bodyPr rtlCol="0" anchor="ctr" wrap="square" lIns="73152" rIns="73152" tIns="18288" bIns="18288"/>
-          <a:lstStyle/>
-          <a:p>
-            <a:pPr algn="l"/>
-            <a:r>
-              <a:rPr sz="1000" b="1">
+          <a:bodyPr rtlCol="0" anchor="ctr" wrap="none" lIns="73152" rIns="73152" tIns="9144" bIns="9144"/>
+          <a:lstStyle/>
+          <a:p>
+            <a:pPr algn="ctr"/>
+            <a:r>
+              <a:rPr sz="900" b="1">
                 <a:solidFill>
                   <a:srgbClr val="664D00"/>
                 </a:solidFill>
                 <a:latin typeface="맑은 고딕"/>
               </a:rPr>
-              <a:t>📎 사진 첨부: Voronoi 4-sublattice 모식도 (4a/4b/4c/4d)</a:t>
+              <a:t>📎 사진 첨부: Voronoi 4-sublattice 모식도</a:t>
             </a:r>
           </a:p>
         </p:txBody>
@@ -12135,7 +12135,7 @@
                 </a:solidFill>
                 <a:latin typeface="맑은 고딕"/>
               </a:rPr>
-              <a:t>17 / 21</a:t>
+              <a:t>17 / 26</a:t>
             </a:r>
           </a:p>
         </p:txBody>
@@ -12148,8 +12148,8 @@
         </p:nvSpPr>
         <p:spPr>
           <a:xfrm>
-            <a:off x="7528255" y="347472"/>
-            <a:ext cx="4206240" cy="384048"/>
+            <a:off x="6933895" y="27432"/>
+            <a:ext cx="5120640" cy="274320"/>
           </a:xfrm>
           <a:prstGeom prst="roundRect">
             <a:avLst/>
@@ -12179,18 +12179,18 @@
           </a:fontRef>
         </p:style>
         <p:txBody>
-          <a:bodyPr rtlCol="0" anchor="ctr" wrap="square" lIns="73152" rIns="73152" tIns="18288" bIns="18288"/>
-          <a:lstStyle/>
-          <a:p>
-            <a:pPr algn="l"/>
-            <a:r>
-              <a:rPr sz="1000" b="1">
+          <a:bodyPr rtlCol="0" anchor="ctr" wrap="none" lIns="73152" rIns="73152" tIns="9144" bIns="9144"/>
+          <a:lstStyle/>
+          <a:p>
+            <a:pPr algn="ctr"/>
+            <a:r>
+              <a:rPr sz="900" b="1">
                 <a:solidFill>
                   <a:srgbClr val="664D00"/>
                 </a:solidFill>
                 <a:latin typeface="맑은 고딕"/>
               </a:rPr>
-              <a:t>📎 사진 첨부: BVSE bimodal 에너지 분포 / pathway 맵</a:t>
+              <a:t>📎 사진 첨부: BVSE bimodal 분포 / pathway 맵</a:t>
             </a:r>
           </a:p>
         </p:txBody>
@@ -12507,8 +12507,8 @@
           <p:nvPr/>
         </p:nvGraphicFramePr>
         <p:xfrm>
-          <a:off x="457200" y="4663440"/>
-          <a:ext cx="11338560" cy="1554480"/>
+          <a:off x="457200" y="4617720"/>
+          <a:ext cx="11338560" cy="1417320"/>
         </p:xfrm>
         <a:graphic>
           <a:graphicData uri="http://schemas.openxmlformats.org/drawingml/2006/table">
@@ -12522,7 +12522,7 @@
                 <a:gridCol w="2834640"/>
                 <a:gridCol w="2834640"/>
               </a:tblGrid>
-              <a:tr h="388620">
+              <a:tr h="354330">
                 <a:tc>
                   <a:txBody>
                     <a:bodyPr lIns="54864" rIns="54864" tIns="18288" bIns="18288"/>
@@ -12612,7 +12612,7 @@
                   </a:tcPr>
                 </a:tc>
               </a:tr>
-              <a:tr h="388620">
+              <a:tr h="354330">
                 <a:tc>
                   <a:txBody>
                     <a:bodyPr lIns="54864" rIns="54864" tIns="18288" bIns="18288"/>
@@ -12702,7 +12702,7 @@
                   </a:tcPr>
                 </a:tc>
               </a:tr>
-              <a:tr h="388620">
+              <a:tr h="354330">
                 <a:tc>
                   <a:txBody>
                     <a:bodyPr lIns="54864" rIns="54864" tIns="18288" bIns="18288"/>
@@ -12792,7 +12792,7 @@
                   </a:tcPr>
                 </a:tc>
               </a:tr>
-              <a:tr h="388620">
+              <a:tr h="354330">
                 <a:tc>
                   <a:txBody>
                     <a:bodyPr lIns="54864" rIns="54864" tIns="18288" bIns="18288"/>
@@ -12894,7 +12894,7 @@
         </p:nvSpPr>
         <p:spPr>
           <a:xfrm>
-            <a:off x="457200" y="6309360"/>
+            <a:off x="457200" y="6108192"/>
             <a:ext cx="11338560" cy="274320"/>
           </a:xfrm>
           <a:prstGeom prst="rect">
@@ -12986,7 +12986,7 @@
                 </a:solidFill>
                 <a:latin typeface="맑은 고딕"/>
               </a:rPr>
-              <a:t>18 / 21</a:t>
+              <a:t>18 / 26</a:t>
             </a:r>
           </a:p>
         </p:txBody>
@@ -12999,8 +12999,8 @@
         </p:nvSpPr>
         <p:spPr>
           <a:xfrm>
-            <a:off x="7528255" y="347472"/>
-            <a:ext cx="4206240" cy="384048"/>
+            <a:off x="6933895" y="27432"/>
+            <a:ext cx="5120640" cy="274320"/>
           </a:xfrm>
           <a:prstGeom prst="roundRect">
             <a:avLst/>
@@ -13030,18 +13030,18 @@
           </a:fontRef>
         </p:style>
         <p:txBody>
-          <a:bodyPr rtlCol="0" anchor="ctr" wrap="square" lIns="73152" rIns="73152" tIns="18288" bIns="18288"/>
-          <a:lstStyle/>
-          <a:p>
-            <a:pPr algn="l"/>
-            <a:r>
-              <a:rPr sz="1000" b="1">
+          <a:bodyPr rtlCol="0" anchor="ctr" wrap="none" lIns="73152" rIns="73152" tIns="9144" bIns="9144"/>
+          <a:lstStyle/>
+          <a:p>
+            <a:pPr algn="ctr"/>
+            <a:r>
+              <a:rPr sz="900" b="1">
                 <a:solidFill>
                   <a:srgbClr val="664D00"/>
                 </a:solidFill>
                 <a:latin typeface="맑은 고딕"/>
               </a:rPr>
-              <a:t>📎 사진 첨부: ELF isosurface (PS₄ covalent + Li–anion ionic)</a:t>
+              <a:t>📎 사진 첨부: ELF isosurface (covalent+ionic)</a:t>
             </a:r>
           </a:p>
         </p:txBody>
@@ -13842,7 +13842,7 @@
                 </a:solidFill>
                 <a:latin typeface="맑은 고딕"/>
               </a:rPr>
-              <a:t>19 / 21</a:t>
+              <a:t>19 / 26</a:t>
             </a:r>
           </a:p>
         </p:txBody>
@@ -13855,8 +13855,8 @@
         </p:nvSpPr>
         <p:spPr>
           <a:xfrm>
-            <a:off x="7528255" y="347472"/>
-            <a:ext cx="4206240" cy="384048"/>
+            <a:off x="6933895" y="27432"/>
+            <a:ext cx="5120640" cy="274320"/>
           </a:xfrm>
           <a:prstGeom prst="roundRect">
             <a:avLst/>
@@ -13886,18 +13886,18 @@
           </a:fontRef>
         </p:style>
         <p:txBody>
-          <a:bodyPr rtlCol="0" anchor="ctr" wrap="square" lIns="73152" rIns="73152" tIns="18288" bIns="18288"/>
-          <a:lstStyle/>
-          <a:p>
-            <a:pPr algn="l"/>
-            <a:r>
-              <a:rPr sz="1000" b="1">
+          <a:bodyPr rtlCol="0" anchor="ctr" wrap="none" lIns="73152" rIns="73152" tIns="9144" bIns="9144"/>
+          <a:lstStyle/>
+          <a:p>
+            <a:pPr algn="ctr"/>
+            <a:r>
+              <a:rPr sz="900" b="1">
                 <a:solidFill>
                   <a:srgbClr val="664D00"/>
                 </a:solidFill>
                 <a:latin typeface="맑은 고딕"/>
               </a:rPr>
-              <a:t>📎 사진 첨부: k-mesh / LOBSTER spilling / AIMD 수렴 plot</a:t>
+              <a:t>📎 사진 첨부: k-mesh / spilling / AIMD 수렴</a:t>
             </a:r>
           </a:p>
         </p:txBody>
@@ -14613,7 +14613,7 @@
                 </a:solidFill>
                 <a:latin typeface="맑은 고딕"/>
               </a:rPr>
-              <a:t>2 / 21</a:t>
+              <a:t>2 / 26</a:t>
             </a:r>
           </a:p>
         </p:txBody>
@@ -14626,8 +14626,8 @@
         </p:nvSpPr>
         <p:spPr>
           <a:xfrm>
-            <a:off x="7528255" y="347472"/>
-            <a:ext cx="4206240" cy="384048"/>
+            <a:off x="6933895" y="27432"/>
+            <a:ext cx="5120640" cy="274320"/>
           </a:xfrm>
           <a:prstGeom prst="roundRect">
             <a:avLst/>
@@ -14657,18 +14657,18 @@
           </a:fontRef>
         </p:style>
         <p:txBody>
-          <a:bodyPr rtlCol="0" anchor="ctr" wrap="square" lIns="73152" rIns="73152" tIns="18288" bIns="18288"/>
-          <a:lstStyle/>
-          <a:p>
-            <a:pPr algn="l"/>
-            <a:r>
-              <a:rPr sz="1000" b="1">
+          <a:bodyPr rtlCol="0" anchor="ctr" wrap="none" lIns="73152" rIns="73152" tIns="9144" bIns="9144"/>
+          <a:lstStyle/>
+          <a:p>
+            <a:pPr algn="ctr"/>
+            <a:r>
+              <a:rPr sz="900" b="1">
                 <a:solidFill>
                   <a:srgbClr val="664D00"/>
                 </a:solidFill>
                 <a:latin typeface="맑은 고딕"/>
               </a:rPr>
-              <a:t>📎 사진 첨부: LPSCl F-43m vs LPSCl₁.₆ R3m 결정구조 (VESTA, 동일 시점)</a:t>
+              <a:t>📎 사진 첨부: 결정구조 VESTA (F-43m vs R3m)</a:t>
             </a:r>
           </a:p>
         </p:txBody>
@@ -15421,7 +15421,7 @@
                 </a:solidFill>
                 <a:latin typeface="맑은 고딕"/>
               </a:rPr>
-              <a:t>20 / 21</a:t>
+              <a:t>20 / 26</a:t>
             </a:r>
           </a:p>
         </p:txBody>
@@ -16152,7 +16152,7 @@
                 </a:solidFill>
                 <a:latin typeface="맑은 고딕"/>
               </a:rPr>
-              <a:t>21 / 21</a:t>
+              <a:t>21 / 26</a:t>
             </a:r>
           </a:p>
         </p:txBody>
@@ -16165,8 +16165,8 @@
         </p:nvSpPr>
         <p:spPr>
           <a:xfrm>
-            <a:off x="7528255" y="347472"/>
-            <a:ext cx="4206240" cy="384048"/>
+            <a:off x="6933895" y="27432"/>
+            <a:ext cx="5120640" cy="274320"/>
           </a:xfrm>
           <a:prstGeom prst="roundRect">
             <a:avLst/>
@@ -16196,18 +16196,18 @@
           </a:fontRef>
         </p:style>
         <p:txBody>
-          <a:bodyPr rtlCol="0" anchor="ctr" wrap="square" lIns="73152" rIns="73152" tIns="18288" bIns="18288"/>
-          <a:lstStyle/>
-          <a:p>
-            <a:pPr algn="l"/>
-            <a:r>
-              <a:rPr sz="1000" b="1">
+          <a:bodyPr rtlCol="0" anchor="ctr" wrap="none" lIns="73152" rIns="73152" tIns="9144" bIns="9144"/>
+          <a:lstStyle/>
+          <a:p>
+            <a:pPr algn="ctr"/>
+            <a:r>
+              <a:rPr sz="900" b="1">
                 <a:solidFill>
                   <a:srgbClr val="664D00"/>
                 </a:solidFill>
                 <a:latin typeface="맑은 고딕"/>
               </a:rPr>
-              <a:t>📎 사진 첨부: 3-probe (BVSE · NEB · MD) 수렴 schematic</a:t>
+              <a:t>📎 사진 첨부: 3-probe 수렴 schematic</a:t>
             </a:r>
           </a:p>
         </p:txBody>
@@ -16907,7 +16907,7 @@
                 </a:solidFill>
                 <a:latin typeface="맑은 고딕"/>
               </a:rPr>
-              <a:t>22 / 21</a:t>
+              <a:t>22 / 26</a:t>
             </a:r>
           </a:p>
         </p:txBody>
@@ -16920,8 +16920,8 @@
         </p:nvSpPr>
         <p:spPr>
           <a:xfrm>
-            <a:off x="7528255" y="347472"/>
-            <a:ext cx="4206240" cy="384048"/>
+            <a:off x="6933895" y="27432"/>
+            <a:ext cx="5120640" cy="274320"/>
           </a:xfrm>
           <a:prstGeom prst="roundRect">
             <a:avLst/>
@@ -16951,18 +16951,18 @@
           </a:fontRef>
         </p:style>
         <p:txBody>
-          <a:bodyPr rtlCol="0" anchor="ctr" wrap="square" lIns="73152" rIns="73152" tIns="18288" bIns="18288"/>
-          <a:lstStyle/>
-          <a:p>
-            <a:pPr algn="l"/>
-            <a:r>
-              <a:rPr sz="1000" b="1">
+          <a:bodyPr rtlCol="0" anchor="ctr" wrap="none" lIns="73152" rIns="73152" tIns="9144" bIns="9144"/>
+          <a:lstStyle/>
+          <a:p>
+            <a:pPr algn="ctr"/>
+            <a:r>
+              <a:rPr sz="900" b="1">
                 <a:solidFill>
                   <a:srgbClr val="664D00"/>
                 </a:solidFill>
                 <a:latin typeface="맑은 고딕"/>
               </a:rPr>
-              <a:t>📎 사진 첨부: Oxidation 4-axis radar 또는 grid</a:t>
+              <a:t>📎 사진 첨부: Oxidation 4-axis radar/grid</a:t>
             </a:r>
           </a:p>
         </p:txBody>
@@ -17892,7 +17892,7 @@
                 </a:solidFill>
                 <a:latin typeface="맑은 고딕"/>
               </a:rPr>
-              <a:t>23 / 21</a:t>
+              <a:t>23 / 26</a:t>
             </a:r>
           </a:p>
         </p:txBody>
@@ -17905,8 +17905,8 @@
         </p:nvSpPr>
         <p:spPr>
           <a:xfrm>
-            <a:off x="7528255" y="347472"/>
-            <a:ext cx="4206240" cy="384048"/>
+            <a:off x="6933895" y="27432"/>
+            <a:ext cx="5120640" cy="274320"/>
           </a:xfrm>
           <a:prstGeom prst="roundRect">
             <a:avLst/>
@@ -17936,18 +17936,18 @@
           </a:fontRef>
         </p:style>
         <p:txBody>
-          <a:bodyPr rtlCol="0" anchor="ctr" wrap="square" lIns="73152" rIns="73152" tIns="18288" bIns="18288"/>
-          <a:lstStyle/>
-          <a:p>
-            <a:pPr algn="l"/>
-            <a:r>
-              <a:rPr sz="1000" b="1">
+          <a:bodyPr rtlCol="0" anchor="ctr" wrap="none" lIns="73152" rIns="73152" tIns="9144" bIns="9144"/>
+          <a:lstStyle/>
+          <a:p>
+            <a:pPr algn="ctr"/>
+            <a:r>
+              <a:rPr sz="900" b="1">
                 <a:solidFill>
                   <a:srgbClr val="664D00"/>
                 </a:solidFill>
                 <a:latin typeface="맑은 고딕"/>
               </a:rPr>
-              <a:t>📎 사진 첨부: Constrained ESW Cl-scan + 분해반응 ΔG 막대</a:t>
+              <a:t>📎 사진 첨부: ESW Cl-scan + 분해반응 ΔG 막대</a:t>
             </a:r>
           </a:p>
         </p:txBody>
@@ -18068,10 +18068,10 @@
                 <a:tableStyleId>{5C22544A-7EE6-4342-B048-85BDC9FD1C3A}</a:tableStyleId>
               </a:tblPr>
               <a:tblGrid>
-                <a:gridCol w="2903220"/>
-                <a:gridCol w="2903220"/>
-                <a:gridCol w="2903220"/>
-                <a:gridCol w="2903220"/>
+                <a:gridCol w="548640"/>
+                <a:gridCol w="4023360"/>
+                <a:gridCol w="3657600"/>
+                <a:gridCol w="3383280"/>
               </a:tblGrid>
               <a:tr h="859536">
                 <a:tc>
@@ -18650,7 +18650,7 @@
                 </a:solidFill>
                 <a:latin typeface="맑은 고딕"/>
               </a:rPr>
-              <a:t>24 / 21</a:t>
+              <a:t>24 / 26</a:t>
             </a:r>
           </a:p>
         </p:txBody>
@@ -18771,9 +18771,9 @@
                 <a:tableStyleId>{5C22544A-7EE6-4342-B048-85BDC9FD1C3A}</a:tableStyleId>
               </a:tblPr>
               <a:tblGrid>
-                <a:gridCol w="3779520"/>
-                <a:gridCol w="3779520"/>
-                <a:gridCol w="3779520"/>
+                <a:gridCol w="548640"/>
+                <a:gridCol w="5120640"/>
+                <a:gridCol w="5669280"/>
               </a:tblGrid>
               <a:tr h="429768">
                 <a:tc>
@@ -19571,7 +19571,7 @@
                 </a:solidFill>
                 <a:latin typeface="맑은 고딕"/>
               </a:rPr>
-              <a:t>25 / 21</a:t>
+              <a:t>25 / 26</a:t>
             </a:r>
           </a:p>
         </p:txBody>
@@ -20172,7 +20172,7 @@
                 </a:solidFill>
                 <a:latin typeface="맑은 고딕"/>
               </a:rPr>
-              <a:t>26 / 21</a:t>
+              <a:t>26 / 26</a:t>
             </a:r>
           </a:p>
         </p:txBody>
@@ -20185,8 +20185,8 @@
         </p:nvSpPr>
         <p:spPr>
           <a:xfrm>
-            <a:off x="7528255" y="347472"/>
-            <a:ext cx="4206240" cy="384048"/>
+            <a:off x="6933895" y="27432"/>
+            <a:ext cx="5120640" cy="274320"/>
           </a:xfrm>
           <a:prstGeom prst="roundRect">
             <a:avLst/>
@@ -20216,18 +20216,18 @@
           </a:fontRef>
         </p:style>
         <p:txBody>
-          <a:bodyPr rtlCol="0" anchor="ctr" wrap="square" lIns="73152" rIns="73152" tIns="18288" bIns="18288"/>
-          <a:lstStyle/>
-          <a:p>
-            <a:pPr algn="l"/>
-            <a:r>
-              <a:rPr sz="1000" b="1">
+          <a:bodyPr rtlCol="0" anchor="ctr" wrap="none" lIns="73152" rIns="73152" tIns="9144" bIns="9144"/>
+          <a:lstStyle/>
+          <a:p>
+            <a:pPr algn="ctr"/>
+            <a:r>
+              <a:rPr sz="900" b="1">
                 <a:solidFill>
                   <a:srgbClr val="664D00"/>
                 </a:solidFill>
                 <a:latin typeface="맑은 고딕"/>
               </a:rPr>
-              <a:t>📎 사진 첨부: Trade-off 4축 + Paper #2 도핑 roadmap</a:t>
+              <a:t>📎 사진 첨부: Trade-off 4축 + 도핑 roadmap</a:t>
             </a:r>
           </a:p>
         </p:txBody>
@@ -20934,8 +20934,8 @@
         </p:nvSpPr>
         <p:spPr>
           <a:xfrm>
-            <a:off x="457200" y="6355080"/>
-            <a:ext cx="11247120" cy="365760"/>
+            <a:off x="457200" y="6144768"/>
+            <a:ext cx="11247120" cy="274320"/>
           </a:xfrm>
           <a:prstGeom prst="rect">
             <a:avLst/>
@@ -21026,7 +21026,7 @@
                 </a:solidFill>
                 <a:latin typeface="맑은 고딕"/>
               </a:rPr>
-              <a:t>3 / 21</a:t>
+              <a:t>3 / 26</a:t>
             </a:r>
           </a:p>
         </p:txBody>
@@ -21039,8 +21039,8 @@
         </p:nvSpPr>
         <p:spPr>
           <a:xfrm>
-            <a:off x="7528255" y="347472"/>
-            <a:ext cx="4206240" cy="384048"/>
+            <a:off x="6933895" y="27432"/>
+            <a:ext cx="5120640" cy="274320"/>
           </a:xfrm>
           <a:prstGeom prst="roundRect">
             <a:avLst/>
@@ -21070,12 +21070,12 @@
           </a:fontRef>
         </p:style>
         <p:txBody>
-          <a:bodyPr rtlCol="0" anchor="ctr" wrap="square" lIns="73152" rIns="73152" tIns="18288" bIns="18288"/>
-          <a:lstStyle/>
-          <a:p>
-            <a:pPr algn="l"/>
-            <a:r>
-              <a:rPr sz="1000" b="1">
+          <a:bodyPr rtlCol="0" anchor="ctr" wrap="none" lIns="73152" rIns="73152" tIns="9144" bIns="9144"/>
+          <a:lstStyle/>
+          <a:p>
+            <a:pPr algn="ctr"/>
+            <a:r>
+              <a:rPr sz="900" b="1">
                 <a:solidFill>
                   <a:srgbClr val="664D00"/>
                 </a:solidFill>
@@ -22246,7 +22246,7 @@
                 </a:solidFill>
                 <a:latin typeface="맑은 고딕"/>
               </a:rPr>
-              <a:t>4 / 21</a:t>
+              <a:t>4 / 26</a:t>
             </a:r>
           </a:p>
         </p:txBody>
@@ -22259,8 +22259,8 @@
         </p:nvSpPr>
         <p:spPr>
           <a:xfrm>
-            <a:off x="7528255" y="347472"/>
-            <a:ext cx="4206240" cy="384048"/>
+            <a:off x="6933895" y="27432"/>
+            <a:ext cx="5120640" cy="274320"/>
           </a:xfrm>
           <a:prstGeom prst="roundRect">
             <a:avLst/>
@@ -22290,12 +22290,12 @@
           </a:fontRef>
         </p:style>
         <p:txBody>
-          <a:bodyPr rtlCol="0" anchor="ctr" wrap="square" lIns="73152" rIns="73152" tIns="18288" bIns="18288"/>
-          <a:lstStyle/>
-          <a:p>
-            <a:pPr algn="l"/>
-            <a:r>
-              <a:rPr sz="1000" b="1">
+          <a:bodyPr rtlCol="0" anchor="ctr" wrap="none" lIns="73152" rIns="73152" tIns="9144" bIns="9144"/>
+          <a:lstStyle/>
+          <a:p>
+            <a:pPr algn="ctr"/>
+            <a:r>
+              <a:rPr sz="900" b="1">
                 <a:solidFill>
                   <a:srgbClr val="664D00"/>
                 </a:solidFill>
@@ -23250,7 +23250,7 @@
                 </a:solidFill>
                 <a:latin typeface="맑은 고딕"/>
               </a:rPr>
-              <a:t>5 / 21</a:t>
+              <a:t>5 / 26</a:t>
             </a:r>
           </a:p>
         </p:txBody>
@@ -23263,8 +23263,8 @@
         </p:nvSpPr>
         <p:spPr>
           <a:xfrm>
-            <a:off x="7528255" y="347472"/>
-            <a:ext cx="4206240" cy="384048"/>
+            <a:off x="6933895" y="27432"/>
+            <a:ext cx="5120640" cy="274320"/>
           </a:xfrm>
           <a:prstGeom prst="roundRect">
             <a:avLst/>
@@ -23294,18 +23294,18 @@
           </a:fontRef>
         </p:style>
         <p:txBody>
-          <a:bodyPr rtlCol="0" anchor="ctr" wrap="square" lIns="73152" rIns="73152" tIns="18288" bIns="18288"/>
-          <a:lstStyle/>
-          <a:p>
-            <a:pPr algn="l"/>
-            <a:r>
-              <a:rPr sz="1000" b="1">
+          <a:bodyPr rtlCol="0" anchor="ctr" wrap="none" lIns="73152" rIns="73152" tIns="9144" bIns="9144"/>
+          <a:lstStyle/>
+          <a:p>
+            <a:pPr algn="ctr"/>
+            <a:r>
+              <a:rPr sz="900" b="1">
                 <a:solidFill>
                   <a:srgbClr val="664D00"/>
                 </a:solidFill>
                 <a:latin typeface="맑은 고딕"/>
               </a:rPr>
-              <a:t>📎 사진 첨부: PDOS 비교 (comp1 vs modelc, atom-projected)</a:t>
+              <a:t>📎 사진 첨부: PDOS overlay (comp1 vs modelc)</a:t>
             </a:r>
           </a:p>
         </p:txBody>
@@ -24262,7 +24262,7 @@
                 </a:solidFill>
                 <a:latin typeface="맑은 고딕"/>
               </a:rPr>
-              <a:t>6 / 21</a:t>
+              <a:t>6 / 26</a:t>
             </a:r>
           </a:p>
         </p:txBody>
@@ -24275,8 +24275,8 @@
         </p:nvSpPr>
         <p:spPr>
           <a:xfrm>
-            <a:off x="7528255" y="347472"/>
-            <a:ext cx="4206240" cy="384048"/>
+            <a:off x="6933895" y="27432"/>
+            <a:ext cx="5120640" cy="274320"/>
           </a:xfrm>
           <a:prstGeom prst="roundRect">
             <a:avLst/>
@@ -24306,18 +24306,18 @@
           </a:fontRef>
         </p:style>
         <p:txBody>
-          <a:bodyPr rtlCol="0" anchor="ctr" wrap="square" lIns="73152" rIns="73152" tIns="18288" bIns="18288"/>
-          <a:lstStyle/>
-          <a:p>
-            <a:pPr algn="l"/>
-            <a:r>
-              <a:rPr sz="1000" b="1">
+          <a:bodyPr rtlCol="0" anchor="ctr" wrap="none" lIns="73152" rIns="73152" tIns="9144" bIns="9144"/>
+          <a:lstStyle/>
+          <a:p>
+            <a:pPr algn="ctr"/>
+            <a:r>
+              <a:rPr sz="900" b="1">
                 <a:solidFill>
                   <a:srgbClr val="664D00"/>
                 </a:solidFill>
                 <a:latin typeface="맑은 고딕"/>
               </a:rPr>
-              <a:t>📎 사진 첨부: σ(T) Arrhenius plot (paired 600/800/1000 K)</a:t>
+              <a:t>📎 사진 첨부: σ(T) Arrhenius plot (3점 paired)</a:t>
             </a:r>
           </a:p>
         </p:txBody>
@@ -24950,7 +24950,7 @@
                 </a:solidFill>
                 <a:latin typeface="맑은 고딕"/>
               </a:rPr>
-              <a:t>7 / 21</a:t>
+              <a:t>7 / 26</a:t>
             </a:r>
           </a:p>
         </p:txBody>
@@ -24963,8 +24963,8 @@
         </p:nvSpPr>
         <p:spPr>
           <a:xfrm>
-            <a:off x="7528255" y="347472"/>
-            <a:ext cx="4206240" cy="384048"/>
+            <a:off x="6933895" y="27432"/>
+            <a:ext cx="5120640" cy="274320"/>
           </a:xfrm>
           <a:prstGeom prst="roundRect">
             <a:avLst/>
@@ -24994,18 +24994,18 @@
           </a:fontRef>
         </p:style>
         <p:txBody>
-          <a:bodyPr rtlCol="0" anchor="ctr" wrap="square" lIns="73152" rIns="73152" tIns="18288" bIns="18288"/>
-          <a:lstStyle/>
-          <a:p>
-            <a:pPr algn="l"/>
-            <a:r>
-              <a:rPr sz="1000" b="1">
+          <a:bodyPr rtlCol="0" anchor="ctr" wrap="none" lIns="73152" rIns="73152" tIns="9144" bIns="9144"/>
+          <a:lstStyle/>
+          <a:p>
+            <a:pPr algn="ctr"/>
+            <a:r>
+              <a:rPr sz="900" b="1">
                 <a:solidFill>
                   <a:srgbClr val="664D00"/>
                 </a:solidFill>
                 <a:latin typeface="맑은 고딕"/>
               </a:rPr>
-              <a:t>📎 사진 첨부: D₀ vs Eₐ 산점도 또는 prefactor 비교 막대</a:t>
+              <a:t>📎 사진 첨부: D₀ vs Eₐ 산점도 / prefactor 막대</a:t>
             </a:r>
           </a:p>
         </p:txBody>
@@ -25589,7 +25589,7 @@
                 </a:solidFill>
                 <a:latin typeface="맑은 고딕"/>
               </a:rPr>
-              <a:t>8 / 21</a:t>
+              <a:t>8 / 26</a:t>
             </a:r>
           </a:p>
         </p:txBody>
@@ -25602,8 +25602,8 @@
         </p:nvSpPr>
         <p:spPr>
           <a:xfrm>
-            <a:off x="7528255" y="347472"/>
-            <a:ext cx="4206240" cy="384048"/>
+            <a:off x="6933895" y="27432"/>
+            <a:ext cx="5120640" cy="274320"/>
           </a:xfrm>
           <a:prstGeom prst="roundRect">
             <a:avLst/>
@@ -25633,18 +25633,18 @@
           </a:fontRef>
         </p:style>
         <p:txBody>
-          <a:bodyPr rtlCol="0" anchor="ctr" wrap="square" lIns="73152" rIns="73152" tIns="18288" bIns="18288"/>
-          <a:lstStyle/>
-          <a:p>
-            <a:pPr algn="l"/>
-            <a:r>
-              <a:rPr sz="1000" b="1">
+          <a:bodyPr rtlCol="0" anchor="ctr" wrap="none" lIns="73152" rIns="73152" tIns="9144" bIns="9144"/>
+          <a:lstStyle/>
+          <a:p>
+            <a:pPr algn="ctr"/>
+            <a:r>
+              <a:rPr sz="900" b="1">
                 <a:solidFill>
                   <a:srgbClr val="664D00"/>
                 </a:solidFill>
                 <a:latin typeface="맑은 고딕"/>
               </a:rPr>
-              <a:t>📎 사진 첨부: Disorder ensemble Eₐ 분포 (matched-d 그룹)</a:t>
+              <a:t>📎 사진 첨부: Disorder ensemble Eₐ 분포</a:t>
             </a:r>
           </a:p>
         </p:txBody>
@@ -26807,7 +26807,7 @@
                 </a:solidFill>
                 <a:latin typeface="맑은 고딕"/>
               </a:rPr>
-              <a:t>9 / 21</a:t>
+              <a:t>9 / 26</a:t>
             </a:r>
           </a:p>
         </p:txBody>
@@ -26820,8 +26820,8 @@
         </p:nvSpPr>
         <p:spPr>
           <a:xfrm>
-            <a:off x="7528255" y="347472"/>
-            <a:ext cx="4206240" cy="384048"/>
+            <a:off x="6933895" y="27432"/>
+            <a:ext cx="5120640" cy="274320"/>
           </a:xfrm>
           <a:prstGeom prst="roundRect">
             <a:avLst/>
@@ -26851,18 +26851,18 @@
           </a:fontRef>
         </p:style>
         <p:txBody>
-          <a:bodyPr rtlCol="0" anchor="ctr" wrap="square" lIns="73152" rIns="73152" tIns="18288" bIns="18288"/>
-          <a:lstStyle/>
-          <a:p>
-            <a:pPr algn="l"/>
-            <a:r>
-              <a:rPr sz="1000" b="1">
+          <a:bodyPr rtlCol="0" anchor="ctr" wrap="none" lIns="73152" rIns="73152" tIns="9144" bIns="9144"/>
+          <a:lstStyle/>
+          <a:p>
+            <a:pPr algn="ctr"/>
+            <a:r>
+              <a:rPr sz="900" b="1">
                 <a:solidFill>
                   <a:srgbClr val="664D00"/>
                 </a:solidFill>
                 <a:latin typeface="맑은 고딕"/>
               </a:rPr>
-              <a:t>📎 사진 첨부: σ(T) 저온 외삽 plot (300 K까지)</a:t>
+              <a:t>📎 사진 첨부: σ(T) 저온 외삽 plot (300 K)</a:t>
             </a:r>
           </a:p>
         </p:txBody>

--- a/kb/papers/lpscl_vs_lpscl16_seminar_v1.pptx
+++ b/kb/papers/lpscl_vs_lpscl16_seminar_v1.pptx
@@ -20475,7 +20475,7 @@
                 </a:solidFill>
                 <a:latin typeface="맑은 고딕"/>
               </a:rPr>
-              <a:t>• Halogen enumerate (45 configs)</a:t>
+              <a:t>• Halogen enumerate (comp1 70 = C(8,4) · modelc 45 = C(10,2))</a:t>
             </a:r>
           </a:p>
           <a:p>
